--- a/AI_for_Operations_Course/Slides/Class_08_Quality_Control_AI.pptx
+++ b/AI_for_Operations_Course/Slides/Class_08_Quality_Control_AI.pptx
@@ -2549,6 +2549,10 @@
           </a:solidFill>
           <a:ln/>
         </p:spPr>
+        <p:txBody>
+          <a:bodyPr/>
+          <a:p/>
+        </p:txBody>
       </p:sp>
       <p:sp>
         <p:nvSpPr>
@@ -3228,6 +3232,10 @@
           </a:solidFill>
           <a:ln/>
         </p:spPr>
+        <p:txBody>
+          <a:bodyPr/>
+          <a:p/>
+        </p:txBody>
       </p:sp>
       <p:sp>
         <p:nvSpPr>
@@ -3809,6 +3817,10 @@
           </a:solidFill>
           <a:ln/>
         </p:spPr>
+        <p:txBody>
+          <a:bodyPr/>
+          <a:p/>
+        </p:txBody>
       </p:sp>
       <p:sp>
         <p:nvSpPr>
@@ -4401,6 +4413,10 @@
           </a:solidFill>
           <a:ln/>
         </p:spPr>
+        <p:txBody>
+          <a:bodyPr/>
+          <a:p/>
+        </p:txBody>
       </p:sp>
       <p:sp>
         <p:nvSpPr>
@@ -4902,6 +4918,10 @@
           </a:solidFill>
           <a:ln/>
         </p:spPr>
+        <p:txBody>
+          <a:bodyPr/>
+          <a:p/>
+        </p:txBody>
       </p:sp>
       <p:sp>
         <p:nvSpPr>
@@ -5472,6 +5492,10 @@
           </a:solidFill>
           <a:ln/>
         </p:spPr>
+        <p:txBody>
+          <a:bodyPr/>
+          <a:p/>
+        </p:txBody>
       </p:sp>
       <p:sp>
         <p:nvSpPr>
@@ -6053,6 +6077,10 @@
           </a:solidFill>
           <a:ln/>
         </p:spPr>
+        <p:txBody>
+          <a:bodyPr/>
+          <a:p/>
+        </p:txBody>
       </p:sp>
       <p:sp>
         <p:nvSpPr>
@@ -6943,6 +6971,10 @@
           </a:solidFill>
           <a:ln/>
         </p:spPr>
+        <p:txBody>
+          <a:bodyPr/>
+          <a:p/>
+        </p:txBody>
       </p:sp>
       <p:sp>
         <p:nvSpPr>
@@ -7446,7 +7478,7 @@
                 <a:ea typeface="Calibri" pitchFamily="34" charset="-122"/>
                 <a:cs typeface="Calibri" pitchFamily="34" charset="-120"/>
               </a:rPr>
-              <a:t>www.proxiant.com</a:t>
+              <a:t>proxiant.ai</a:t>
             </a:r>
             <a:endParaRPr lang="en-US" sz="1800" dirty="0"/>
           </a:p>
@@ -7535,6 +7567,10 @@
           </a:solidFill>
           <a:ln/>
         </p:spPr>
+        <p:txBody>
+          <a:bodyPr/>
+          <a:p/>
+        </p:txBody>
       </p:sp>
       <p:sp>
         <p:nvSpPr>
@@ -7938,6 +7974,10 @@
           </a:solidFill>
           <a:ln/>
         </p:spPr>
+        <p:txBody>
+          <a:bodyPr/>
+          <a:p/>
+        </p:txBody>
       </p:sp>
       <p:sp>
         <p:nvSpPr>
@@ -8479,6 +8519,10 @@
           </a:solidFill>
           <a:ln/>
         </p:spPr>
+        <p:txBody>
+          <a:bodyPr/>
+          <a:p/>
+        </p:txBody>
       </p:sp>
       <p:sp>
         <p:nvSpPr>
@@ -9129,6 +9173,10 @@
           </a:solidFill>
           <a:ln/>
         </p:spPr>
+        <p:txBody>
+          <a:bodyPr/>
+          <a:p/>
+        </p:txBody>
       </p:sp>
       <p:sp>
         <p:nvSpPr>
@@ -9717,6 +9765,10 @@
           </a:solidFill>
           <a:ln/>
         </p:spPr>
+        <p:txBody>
+          <a:bodyPr/>
+          <a:p/>
+        </p:txBody>
       </p:sp>
       <p:sp>
         <p:nvSpPr>
@@ -10298,6 +10350,10 @@
           </a:solidFill>
           <a:ln/>
         </p:spPr>
+        <p:txBody>
+          <a:bodyPr/>
+          <a:p/>
+        </p:txBody>
       </p:sp>
       <p:sp>
         <p:nvSpPr>
@@ -10879,6 +10935,10 @@
           </a:solidFill>
           <a:ln/>
         </p:spPr>
+        <p:txBody>
+          <a:bodyPr/>
+          <a:p/>
+        </p:txBody>
       </p:sp>
       <p:sp>
         <p:nvSpPr>
@@ -11460,6 +11520,10 @@
           </a:solidFill>
           <a:ln/>
         </p:spPr>
+        <p:txBody>
+          <a:bodyPr/>
+          <a:p/>
+        </p:txBody>
       </p:sp>
       <p:sp>
         <p:nvSpPr>
